--- a/Chapter 5/Java OOP and Data Structures Chapter 5.pptx
+++ b/Chapter 5/Java OOP and Data Structures Chapter 5.pptx
@@ -2272,7 +2272,7 @@
           <a:p>
             <a:fld id="{C2FFCED8-506F-49AF-BE73-3D1A33480DE3}" type="datetimeFigureOut">
               <a:rPr lang="en-US" smtClean="0"/>
-              <a:t>8/31/2025</a:t>
+              <a:t>9/5/2026</a:t>
             </a:fld>
             <a:endParaRPr lang="en-US"/>
           </a:p>
@@ -2770,7 +2770,7 @@
           <a:p>
             <a:fld id="{EEE8669A-962F-4ACD-AB1E-07597AA7AD56}" type="datetimeFigureOut">
               <a:rPr lang="en-US" smtClean="0"/>
-              <a:t>8/31/2025</a:t>
+              <a:t>9/5/2026</a:t>
             </a:fld>
             <a:endParaRPr lang="en-US"/>
           </a:p>
@@ -2968,7 +2968,7 @@
           <a:p>
             <a:fld id="{EEE8669A-962F-4ACD-AB1E-07597AA7AD56}" type="datetimeFigureOut">
               <a:rPr lang="en-US" smtClean="0"/>
-              <a:t>8/31/2025</a:t>
+              <a:t>9/5/2026</a:t>
             </a:fld>
             <a:endParaRPr lang="en-US"/>
           </a:p>
@@ -3176,7 +3176,7 @@
           <a:p>
             <a:fld id="{EEE8669A-962F-4ACD-AB1E-07597AA7AD56}" type="datetimeFigureOut">
               <a:rPr lang="en-US" smtClean="0"/>
-              <a:t>8/31/2025</a:t>
+              <a:t>9/5/2026</a:t>
             </a:fld>
             <a:endParaRPr lang="en-US"/>
           </a:p>
@@ -3374,7 +3374,7 @@
           <a:p>
             <a:fld id="{EEE8669A-962F-4ACD-AB1E-07597AA7AD56}" type="datetimeFigureOut">
               <a:rPr lang="en-US" smtClean="0"/>
-              <a:t>8/31/2025</a:t>
+              <a:t>9/5/2026</a:t>
             </a:fld>
             <a:endParaRPr lang="en-US"/>
           </a:p>
@@ -3649,7 +3649,7 @@
           <a:p>
             <a:fld id="{EEE8669A-962F-4ACD-AB1E-07597AA7AD56}" type="datetimeFigureOut">
               <a:rPr lang="en-US" smtClean="0"/>
-              <a:t>8/31/2025</a:t>
+              <a:t>9/5/2026</a:t>
             </a:fld>
             <a:endParaRPr lang="en-US"/>
           </a:p>
@@ -3914,7 +3914,7 @@
           <a:p>
             <a:fld id="{EEE8669A-962F-4ACD-AB1E-07597AA7AD56}" type="datetimeFigureOut">
               <a:rPr lang="en-US" smtClean="0"/>
-              <a:t>8/31/2025</a:t>
+              <a:t>9/5/2026</a:t>
             </a:fld>
             <a:endParaRPr lang="en-US"/>
           </a:p>
@@ -4326,7 +4326,7 @@
           <a:p>
             <a:fld id="{EEE8669A-962F-4ACD-AB1E-07597AA7AD56}" type="datetimeFigureOut">
               <a:rPr lang="en-US" smtClean="0"/>
-              <a:t>8/31/2025</a:t>
+              <a:t>9/5/2026</a:t>
             </a:fld>
             <a:endParaRPr lang="en-US"/>
           </a:p>
@@ -4467,7 +4467,7 @@
           <a:p>
             <a:fld id="{EEE8669A-962F-4ACD-AB1E-07597AA7AD56}" type="datetimeFigureOut">
               <a:rPr lang="en-US" smtClean="0"/>
-              <a:t>8/31/2025</a:t>
+              <a:t>9/5/2026</a:t>
             </a:fld>
             <a:endParaRPr lang="en-US"/>
           </a:p>
@@ -4580,7 +4580,7 @@
           <a:p>
             <a:fld id="{EEE8669A-962F-4ACD-AB1E-07597AA7AD56}" type="datetimeFigureOut">
               <a:rPr lang="en-US" smtClean="0"/>
-              <a:t>8/31/2025</a:t>
+              <a:t>9/5/2026</a:t>
             </a:fld>
             <a:endParaRPr lang="en-US"/>
           </a:p>
@@ -4891,7 +4891,7 @@
           <a:p>
             <a:fld id="{EEE8669A-962F-4ACD-AB1E-07597AA7AD56}" type="datetimeFigureOut">
               <a:rPr lang="en-US" smtClean="0"/>
-              <a:t>8/31/2025</a:t>
+              <a:t>9/5/2026</a:t>
             </a:fld>
             <a:endParaRPr lang="en-US"/>
           </a:p>
@@ -5179,7 +5179,7 @@
           <a:p>
             <a:fld id="{EEE8669A-962F-4ACD-AB1E-07597AA7AD56}" type="datetimeFigureOut">
               <a:rPr lang="en-US" smtClean="0"/>
-              <a:t>8/31/2025</a:t>
+              <a:t>9/5/2026</a:t>
             </a:fld>
             <a:endParaRPr lang="en-US"/>
           </a:p>
@@ -5420,7 +5420,7 @@
           <a:p>
             <a:fld id="{EEE8669A-962F-4ACD-AB1E-07597AA7AD56}" type="datetimeFigureOut">
               <a:rPr lang="en-US" smtClean="0"/>
-              <a:t>8/31/2025</a:t>
+              <a:t>9/5/2026</a:t>
             </a:fld>
             <a:endParaRPr lang="en-US"/>
           </a:p>
@@ -5839,10 +5839,13 @@
       </p:grpSpPr>
       <p:pic>
         <p:nvPicPr>
-          <p:cNvPr id="3" name="Picture 2" descr="A book cover with text&#10;&#10;AI-generated content may be incorrect.">
+          <p:cNvPr id="3" name="Picture 2">
             <a:extLst>
               <a:ext uri="{FF2B5EF4-FFF2-40B4-BE49-F238E27FC236}">
                 <a16:creationId xmlns:a16="http://schemas.microsoft.com/office/drawing/2014/main" id="{9B42642B-877C-E7C7-3675-E381E528B9A1}"/>
+              </a:ext>
+              <a:ext uri="{C183D7F6-B498-43B3-948B-1728B52AA6E4}">
+                <adec:decorative xmlns:adec="http://schemas.microsoft.com/office/drawing/2017/decorative" val="1"/>
               </a:ext>
             </a:extLst>
           </p:cNvPr>
@@ -6015,7 +6018,7 @@
       </p:pic>
       <p:pic>
         <p:nvPicPr>
-          <p:cNvPr id="5" name="Picture 4">
+          <p:cNvPr id="5" name="Picture 4" descr="Inheritance hierarchy between Object and Animal, Animal and Pet/Wildlife">
             <a:extLst>
               <a:ext uri="{FF2B5EF4-FFF2-40B4-BE49-F238E27FC236}">
                 <a16:creationId xmlns:a16="http://schemas.microsoft.com/office/drawing/2014/main" id="{DF30CFB9-7049-F284-2760-68DB88AC3636}"/>
@@ -7134,6 +7137,9 @@
               <a:ext uri="{FF2B5EF4-FFF2-40B4-BE49-F238E27FC236}">
                 <a16:creationId xmlns:a16="http://schemas.microsoft.com/office/drawing/2014/main" id="{D392E1A0-8478-B6B4-22FC-B8354227234A}"/>
               </a:ext>
+              <a:ext uri="{C183D7F6-B498-43B3-948B-1728B52AA6E4}">
+                <adec:decorative xmlns:adec="http://schemas.microsoft.com/office/drawing/2017/decorative" val="1"/>
+              </a:ext>
             </a:extLst>
           </p:cNvPr>
           <p:cNvPicPr>
@@ -7369,6 +7375,9 @@
             <a:extLst>
               <a:ext uri="{FF2B5EF4-FFF2-40B4-BE49-F238E27FC236}">
                 <a16:creationId xmlns:a16="http://schemas.microsoft.com/office/drawing/2014/main" id="{885A8E39-C6B3-5DE5-1AA9-0FB4B565E77B}"/>
+              </a:ext>
+              <a:ext uri="{C183D7F6-B498-43B3-948B-1728B52AA6E4}">
+                <adec:decorative xmlns:adec="http://schemas.microsoft.com/office/drawing/2017/decorative" val="1"/>
               </a:ext>
             </a:extLst>
           </p:cNvPr>
@@ -12177,7 +12186,7 @@
       </p:pic>
       <p:pic>
         <p:nvPicPr>
-          <p:cNvPr id="7" name="Picture 6">
+          <p:cNvPr id="7" name="Picture 6" descr="Dynamic Polymorphism and Static Polymorphism">
             <a:extLst>
               <a:ext uri="{FF2B5EF4-FFF2-40B4-BE49-F238E27FC236}">
                 <a16:creationId xmlns:a16="http://schemas.microsoft.com/office/drawing/2014/main" id="{BF8DEB21-8DC2-2E23-A662-A15A4C192171}"/>
@@ -17198,7 +17207,7 @@
       </p:pic>
       <p:pic>
         <p:nvPicPr>
-          <p:cNvPr id="5" name="Picture 4">
+          <p:cNvPr id="5" name="Picture 4" descr="Inheritance relation between Animal Class and Pet/Wildlife classes">
             <a:extLst>
               <a:ext uri="{FF2B5EF4-FFF2-40B4-BE49-F238E27FC236}">
                 <a16:creationId xmlns:a16="http://schemas.microsoft.com/office/drawing/2014/main" id="{671D524C-AD7D-37E1-B0E5-4E29877D9824}"/>
